--- a/03-课件PPT/讲次版/第1章-3-讲次 1-3 · Prompt Engineering.pptx
+++ b/03-课件PPT/讲次版/第1章-3-讲次 1-3 · Prompt Engineering.pptx
@@ -4652,7 +4652,7 @@
                 </a:solidFill>
                 <a:latin typeface="PingFang SC"/>
               </a:rPr>
-              <a:t>格式与目标输出严格同构|格式敏感任务首选</a:t>
+              <a:t>格式与目标输出严格同构</a:t>
             </a:r>
           </a:p>
         </p:txBody>
@@ -11415,46 +11415,7 @@
       </p:sp>
       <p:sp>
         <p:nvSpPr>
-          <p:cNvPr id="5" name="TextBox 4"/>
-          <p:cNvSpPr txBox="1"/>
-          <p:nvPr/>
-        </p:nvSpPr>
-        <p:spPr>
-          <a:xfrm>
-            <a:off x="9334500" y="0"/>
-            <a:ext cx="2667000" cy="704850"/>
-          </a:xfrm>
-          <a:prstGeom prst="rect">
-            <a:avLst/>
-          </a:prstGeom>
-          <a:noFill/>
-        </p:spPr>
-        <p:txBody>
-          <a:bodyPr wrap="square" anchor="ctr">
-            <a:spAutoFit/>
-          </a:bodyPr>
-          <a:lstStyle/>
-          <a:p>
-            <a:pPr algn="r">
-              <a:lnSpc>
-                <a:spcPct val="100000"/>
-              </a:lnSpc>
-            </a:pPr>
-            <a:r>
-              <a:rPr sz="1100" b="0">
-                <a:solidFill>
-                  <a:srgbClr val="94A3B8"/>
-                </a:solidFill>
-                <a:latin typeface="PingFang SC"/>
-              </a:rPr>
-              <a:t>实测:ignore all previous → 400</a:t>
-            </a:r>
-          </a:p>
-        </p:txBody>
-      </p:sp>
-      <p:sp>
-        <p:nvSpPr>
-          <p:cNvPr id="6" name="Rounded Rectangle 5"/>
+          <p:cNvPr id="5" name="Rounded Rectangle 4"/>
           <p:cNvSpPr/>
           <p:nvPr/>
         </p:nvSpPr>
@@ -11502,7 +11463,7 @@
       </p:sp>
       <p:sp>
         <p:nvSpPr>
-          <p:cNvPr id="7" name="Rectangle 6"/>
+          <p:cNvPr id="6" name="Rectangle 5"/>
           <p:cNvSpPr/>
           <p:nvPr/>
         </p:nvSpPr>
@@ -11546,7 +11507,7 @@
       </p:sp>
       <p:sp>
         <p:nvSpPr>
-          <p:cNvPr id="8" name="Rounded Rectangle 7"/>
+          <p:cNvPr id="7" name="Rounded Rectangle 6"/>
           <p:cNvSpPr/>
           <p:nvPr/>
         </p:nvSpPr>
@@ -11592,7 +11553,7 @@
       </p:sp>
       <p:sp>
         <p:nvSpPr>
-          <p:cNvPr id="9" name="TextBox 8"/>
+          <p:cNvPr id="8" name="TextBox 7"/>
           <p:cNvSpPr txBox="1"/>
           <p:nvPr/>
         </p:nvSpPr>
@@ -11631,7 +11592,7 @@
       </p:sp>
       <p:sp>
         <p:nvSpPr>
-          <p:cNvPr id="10" name="TextBox 9"/>
+          <p:cNvPr id="9" name="TextBox 8"/>
           <p:cNvSpPr txBox="1"/>
           <p:nvPr/>
         </p:nvSpPr>
@@ -11663,14 +11624,14 @@
                 </a:solidFill>
                 <a:latin typeface="PingFang SC"/>
               </a:rPr>
-              <a:t>note=双层防线:位置纪律+输出校验|实测:ignore all previous → 400</a:t>
-            </a:r>
-          </a:p>
-        </p:txBody>
-      </p:sp>
-      <p:sp>
-        <p:nvSpPr>
-          <p:cNvPr id="11" name="TextBox 10"/>
+              <a:t>note=双层防线:位置纪律+输出校验</a:t>
+            </a:r>
+          </a:p>
+        </p:txBody>
+      </p:sp>
+      <p:sp>
+        <p:nvSpPr>
+          <p:cNvPr id="10" name="TextBox 9"/>
           <p:cNvSpPr txBox="1"/>
           <p:nvPr/>
         </p:nvSpPr>
@@ -11709,7 +11670,7 @@
       </p:sp>
       <p:sp>
         <p:nvSpPr>
-          <p:cNvPr id="12" name="TextBox 11"/>
+          <p:cNvPr id="11" name="TextBox 10"/>
           <p:cNvSpPr txBox="1"/>
           <p:nvPr/>
         </p:nvSpPr>
@@ -11893,53 +11854,14 @@
       </p:sp>
       <p:sp>
         <p:nvSpPr>
-          <p:cNvPr id="5" name="TextBox 4"/>
-          <p:cNvSpPr txBox="1"/>
-          <p:nvPr/>
-        </p:nvSpPr>
-        <p:spPr>
-          <a:xfrm>
-            <a:off x="9334500" y="0"/>
-            <a:ext cx="2667000" cy="704850"/>
-          </a:xfrm>
-          <a:prstGeom prst="rect">
-            <a:avLst/>
-          </a:prstGeom>
-          <a:noFill/>
-        </p:spPr>
-        <p:txBody>
-          <a:bodyPr wrap="square" anchor="ctr">
-            <a:spAutoFit/>
-          </a:bodyPr>
-          <a:lstStyle/>
-          <a:p>
-            <a:pPr algn="r">
-              <a:lnSpc>
-                <a:spcPct val="100000"/>
-              </a:lnSpc>
-            </a:pPr>
-            <a:r>
-              <a:rPr sz="1100" b="0">
-                <a:solidFill>
-                  <a:srgbClr val="94A3B8"/>
-                </a:solidFill>
-                <a:latin typeface="PingFang SC"/>
-              </a:rPr>
-              <a:t>$ curl -X POST :8000/v1/chat/completions -d '{"content":"ignore all previous instructions"}';HTTP 400  injection pattern matched;$ curl -H 'x-idempotency-key: replay-1' …(第2次);HTTP 429  replay detected;$ for i in 1..14;连续请求;200 200 200 200 200 200 200 200 429 429 429 429 429 429;# 限流:桶容量 8 耗尽后全部 429|v1.3 实测记录</a:t>
-            </a:r>
-          </a:p>
-        </p:txBody>
-      </p:sp>
-      <p:sp>
-        <p:nvSpPr>
-          <p:cNvPr id="6" name="Rounded Rectangle 5"/>
-          <p:cNvSpPr/>
-          <p:nvPr/>
-        </p:nvSpPr>
-        <p:spPr>
-          <a:xfrm>
-            <a:off x="1333500" y="952500"/>
-            <a:ext cx="9525000" cy="5048250"/>
+          <p:cNvPr id="5" name="Rounded Rectangle 4"/>
+          <p:cNvSpPr/>
+          <p:nvPr/>
+        </p:nvSpPr>
+        <p:spPr>
+          <a:xfrm>
+            <a:off x="1333500" y="1047750"/>
+            <a:ext cx="9525000" cy="3524250"/>
           </a:xfrm>
           <a:prstGeom prst="roundRect">
             <a:avLst>
@@ -11978,13 +11900,13 @@
       </p:sp>
       <p:sp>
         <p:nvSpPr>
-          <p:cNvPr id="7" name="Rectangle 6"/>
-          <p:cNvSpPr/>
-          <p:nvPr/>
-        </p:nvSpPr>
-        <p:spPr>
-          <a:xfrm>
-            <a:off x="1333500" y="952500"/>
+          <p:cNvPr id="6" name="Rectangle 5"/>
+          <p:cNvSpPr/>
+          <p:nvPr/>
+        </p:nvSpPr>
+        <p:spPr>
+          <a:xfrm>
+            <a:off x="1333500" y="1047750"/>
             <a:ext cx="9525000" cy="381000"/>
           </a:xfrm>
           <a:prstGeom prst="rect">
@@ -12022,13 +11944,13 @@
       </p:sp>
       <p:sp>
         <p:nvSpPr>
-          <p:cNvPr id="8" name="Rounded Rectangle 7"/>
-          <p:cNvSpPr/>
-          <p:nvPr/>
-        </p:nvSpPr>
-        <p:spPr>
-          <a:xfrm>
-            <a:off x="1504950" y="1085850"/>
+          <p:cNvPr id="7" name="Rounded Rectangle 6"/>
+          <p:cNvSpPr/>
+          <p:nvPr/>
+        </p:nvSpPr>
+        <p:spPr>
+          <a:xfrm>
+            <a:off x="1504950" y="1181100"/>
             <a:ext cx="123825" cy="123825"/>
           </a:xfrm>
           <a:prstGeom prst="roundRect">
@@ -12068,13 +11990,13 @@
       </p:sp>
       <p:sp>
         <p:nvSpPr>
-          <p:cNvPr id="9" name="Rounded Rectangle 8"/>
-          <p:cNvSpPr/>
-          <p:nvPr/>
-        </p:nvSpPr>
-        <p:spPr>
-          <a:xfrm>
-            <a:off x="1752600" y="1085850"/>
+          <p:cNvPr id="8" name="Rounded Rectangle 7"/>
+          <p:cNvSpPr/>
+          <p:nvPr/>
+        </p:nvSpPr>
+        <p:spPr>
+          <a:xfrm>
+            <a:off x="1752600" y="1181100"/>
             <a:ext cx="123825" cy="123825"/>
           </a:xfrm>
           <a:prstGeom prst="roundRect">
@@ -12114,13 +12036,13 @@
       </p:sp>
       <p:sp>
         <p:nvSpPr>
-          <p:cNvPr id="10" name="Rounded Rectangle 9"/>
-          <p:cNvSpPr/>
-          <p:nvPr/>
-        </p:nvSpPr>
-        <p:spPr>
-          <a:xfrm>
-            <a:off x="2000250" y="1085850"/>
+          <p:cNvPr id="9" name="Rounded Rectangle 8"/>
+          <p:cNvSpPr/>
+          <p:nvPr/>
+        </p:nvSpPr>
+        <p:spPr>
+          <a:xfrm>
+            <a:off x="2000250" y="1181100"/>
             <a:ext cx="123825" cy="123825"/>
           </a:xfrm>
           <a:prstGeom prst="roundRect">
@@ -12160,13 +12082,13 @@
       </p:sp>
       <p:sp>
         <p:nvSpPr>
-          <p:cNvPr id="11" name="TextBox 10"/>
+          <p:cNvPr id="10" name="TextBox 9"/>
           <p:cNvSpPr txBox="1"/>
           <p:nvPr/>
         </p:nvSpPr>
         <p:spPr>
           <a:xfrm>
-            <a:off x="2381250" y="952500"/>
+            <a:off x="2381250" y="1047750"/>
             <a:ext cx="8286750" cy="381000"/>
           </a:xfrm>
           <a:prstGeom prst="rect">
@@ -12199,14 +12121,14 @@
       </p:sp>
       <p:sp>
         <p:nvSpPr>
-          <p:cNvPr id="12" name="TextBox 11"/>
+          <p:cNvPr id="11" name="TextBox 10"/>
           <p:cNvSpPr txBox="1"/>
           <p:nvPr/>
         </p:nvSpPr>
         <p:spPr>
           <a:xfrm>
-            <a:off x="1562100" y="1485900"/>
-            <a:ext cx="9067800" cy="4381500"/>
+            <a:off x="1562100" y="1581150"/>
+            <a:ext cx="9067800" cy="2857500"/>
           </a:xfrm>
           <a:prstGeom prst="rect">
             <a:avLst/>
@@ -12350,7 +12272,7 @@
       </p:sp>
       <p:sp>
         <p:nvSpPr>
-          <p:cNvPr id="13" name="TextBox 12"/>
+          <p:cNvPr id="12" name="TextBox 11"/>
           <p:cNvSpPr txBox="1"/>
           <p:nvPr/>
         </p:nvSpPr>
@@ -12389,7 +12311,7 @@
       </p:sp>
       <p:sp>
         <p:nvSpPr>
-          <p:cNvPr id="14" name="TextBox 13"/>
+          <p:cNvPr id="13" name="TextBox 12"/>
           <p:cNvSpPr txBox="1"/>
           <p:nvPr/>
         </p:nvSpPr>
@@ -21430,7 +21352,7 @@
         <p:spPr>
           <a:xfrm>
             <a:off x="365760" y="762000"/>
-            <a:ext cx="11460480" cy="1823258"/>
+            <a:ext cx="11460480" cy="4948843"/>
           </a:xfrm>
           <a:prstGeom prst="rect">
             <a:avLst/>
@@ -24621,60 +24543,21 @@
                 </a:solidFill>
                 <a:latin typeface="PingFang SC"/>
               </a:rPr>
-              <a:t>示例复读复现与修复,$ curl ... -d '{"content":"给个示例"}';输出: 示例:小明提交了 PR...;修复: 显著分隔符 + "勿复读示例" 约束;回归: 用例覆盖示例复读;# few-shot 是双刃剑:格式受益/内容风险</a:t>
-            </a:r>
-          </a:p>
-        </p:txBody>
-      </p:sp>
-      <p:sp>
-        <p:nvSpPr>
-          <p:cNvPr id="5" name="TextBox 4"/>
-          <p:cNvSpPr txBox="1"/>
-          <p:nvPr/>
-        </p:nvSpPr>
-        <p:spPr>
-          <a:xfrm>
-            <a:off x="9334500" y="0"/>
-            <a:ext cx="2667000" cy="704850"/>
-          </a:xfrm>
-          <a:prstGeom prst="rect">
-            <a:avLst/>
-          </a:prstGeom>
-          <a:noFill/>
-        </p:spPr>
-        <p:txBody>
-          <a:bodyPr wrap="square" anchor="ctr">
-            <a:spAutoFit/>
-          </a:bodyPr>
-          <a:lstStyle/>
-          <a:p>
-            <a:pPr algn="r">
-              <a:lnSpc>
-                <a:spcPct val="100000"/>
-              </a:lnSpc>
-            </a:pPr>
-            <a:r>
-              <a:rPr sz="1100" b="0">
-                <a:solidFill>
-                  <a:srgbClr val="94A3B8"/>
-                </a:solidFill>
-                <a:latin typeface="PingFang SC"/>
-              </a:rPr>
-              <a:t>真实踩坑记录</a:t>
-            </a:r>
-          </a:p>
-        </p:txBody>
-      </p:sp>
-      <p:sp>
-        <p:nvSpPr>
-          <p:cNvPr id="6" name="Rounded Rectangle 5"/>
-          <p:cNvSpPr/>
-          <p:nvPr/>
-        </p:nvSpPr>
-        <p:spPr>
-          <a:xfrm>
-            <a:off x="1333500" y="952500"/>
-            <a:ext cx="9525000" cy="5048250"/>
+              <a:t>示例复读复现与修复</a:t>
+            </a:r>
+          </a:p>
+        </p:txBody>
+      </p:sp>
+      <p:sp>
+        <p:nvSpPr>
+          <p:cNvPr id="5" name="Rounded Rectangle 4"/>
+          <p:cNvSpPr/>
+          <p:nvPr/>
+        </p:nvSpPr>
+        <p:spPr>
+          <a:xfrm>
+            <a:off x="1333500" y="1047750"/>
+            <a:ext cx="9525000" cy="2667000"/>
           </a:xfrm>
           <a:prstGeom prst="roundRect">
             <a:avLst>
@@ -24713,13 +24596,13 @@
       </p:sp>
       <p:sp>
         <p:nvSpPr>
-          <p:cNvPr id="7" name="Rectangle 6"/>
-          <p:cNvSpPr/>
-          <p:nvPr/>
-        </p:nvSpPr>
-        <p:spPr>
-          <a:xfrm>
-            <a:off x="1333500" y="952500"/>
+          <p:cNvPr id="6" name="Rectangle 5"/>
+          <p:cNvSpPr/>
+          <p:nvPr/>
+        </p:nvSpPr>
+        <p:spPr>
+          <a:xfrm>
+            <a:off x="1333500" y="1047750"/>
             <a:ext cx="9525000" cy="381000"/>
           </a:xfrm>
           <a:prstGeom prst="rect">
@@ -24757,13 +24640,13 @@
       </p:sp>
       <p:sp>
         <p:nvSpPr>
-          <p:cNvPr id="8" name="Rounded Rectangle 7"/>
-          <p:cNvSpPr/>
-          <p:nvPr/>
-        </p:nvSpPr>
-        <p:spPr>
-          <a:xfrm>
-            <a:off x="1504950" y="1085850"/>
+          <p:cNvPr id="7" name="Rounded Rectangle 6"/>
+          <p:cNvSpPr/>
+          <p:nvPr/>
+        </p:nvSpPr>
+        <p:spPr>
+          <a:xfrm>
+            <a:off x="1504950" y="1181100"/>
             <a:ext cx="123825" cy="123825"/>
           </a:xfrm>
           <a:prstGeom prst="roundRect">
@@ -24803,13 +24686,13 @@
       </p:sp>
       <p:sp>
         <p:nvSpPr>
-          <p:cNvPr id="9" name="Rounded Rectangle 8"/>
-          <p:cNvSpPr/>
-          <p:nvPr/>
-        </p:nvSpPr>
-        <p:spPr>
-          <a:xfrm>
-            <a:off x="1752600" y="1085850"/>
+          <p:cNvPr id="8" name="Rounded Rectangle 7"/>
+          <p:cNvSpPr/>
+          <p:nvPr/>
+        </p:nvSpPr>
+        <p:spPr>
+          <a:xfrm>
+            <a:off x="1752600" y="1181100"/>
             <a:ext cx="123825" cy="123825"/>
           </a:xfrm>
           <a:prstGeom prst="roundRect">
@@ -24849,13 +24732,13 @@
       </p:sp>
       <p:sp>
         <p:nvSpPr>
-          <p:cNvPr id="10" name="Rounded Rectangle 9"/>
-          <p:cNvSpPr/>
-          <p:nvPr/>
-        </p:nvSpPr>
-        <p:spPr>
-          <a:xfrm>
-            <a:off x="2000250" y="1085850"/>
+          <p:cNvPr id="9" name="Rounded Rectangle 8"/>
+          <p:cNvSpPr/>
+          <p:nvPr/>
+        </p:nvSpPr>
+        <p:spPr>
+          <a:xfrm>
+            <a:off x="2000250" y="1181100"/>
             <a:ext cx="123825" cy="123825"/>
           </a:xfrm>
           <a:prstGeom prst="roundRect">
@@ -24895,13 +24778,13 @@
       </p:sp>
       <p:sp>
         <p:nvSpPr>
-          <p:cNvPr id="11" name="TextBox 10"/>
+          <p:cNvPr id="10" name="TextBox 9"/>
           <p:cNvSpPr txBox="1"/>
           <p:nvPr/>
         </p:nvSpPr>
         <p:spPr>
           <a:xfrm>
-            <a:off x="2381250" y="952500"/>
+            <a:off x="2381250" y="1047750"/>
             <a:ext cx="8286750" cy="381000"/>
           </a:xfrm>
           <a:prstGeom prst="rect">
@@ -24934,14 +24817,14 @@
       </p:sp>
       <p:sp>
         <p:nvSpPr>
-          <p:cNvPr id="12" name="TextBox 11"/>
+          <p:cNvPr id="11" name="TextBox 10"/>
           <p:cNvSpPr txBox="1"/>
           <p:nvPr/>
         </p:nvSpPr>
         <p:spPr>
           <a:xfrm>
-            <a:off x="1562100" y="1485900"/>
-            <a:ext cx="9067800" cy="4381500"/>
+            <a:off x="1562100" y="1581150"/>
+            <a:ext cx="9067800" cy="2000250"/>
           </a:xfrm>
           <a:prstGeom prst="rect">
             <a:avLst/>
@@ -24960,20 +24843,84 @@
               </a:lnSpc>
             </a:pPr>
             <a:r>
+              <a:rPr sz="1300" b="1">
+                <a:solidFill>
+                  <a:srgbClr val="34D399"/>
+                </a:solidFill>
+                <a:latin typeface="Menlo"/>
+              </a:rPr>
+              <a:t>$ curl ... -d '{"content":"给个示例"}'</a:t>
+            </a:r>
+          </a:p>
+          <a:p>
+            <a:pPr>
+              <a:lnSpc>
+                <a:spcPct val="115000"/>
+              </a:lnSpc>
+            </a:pPr>
+            <a:r>
               <a:rPr sz="1300">
                 <a:solidFill>
                   <a:srgbClr val="CBD5E1"/>
                 </a:solidFill>
                 <a:latin typeface="Menlo"/>
               </a:rPr>
-              <a:t>真实踩坑记录</a:t>
-            </a:r>
-          </a:p>
-        </p:txBody>
-      </p:sp>
-      <p:sp>
-        <p:nvSpPr>
-          <p:cNvPr id="13" name="TextBox 12"/>
+              <a:t>输出: 示例:小明提交了 PR...</a:t>
+            </a:r>
+          </a:p>
+          <a:p>
+            <a:pPr>
+              <a:lnSpc>
+                <a:spcPct val="115000"/>
+              </a:lnSpc>
+            </a:pPr>
+            <a:r>
+              <a:rPr sz="1300">
+                <a:solidFill>
+                  <a:srgbClr val="CBD5E1"/>
+                </a:solidFill>
+                <a:latin typeface="Menlo"/>
+              </a:rPr>
+              <a:t>修复: 显著分隔符 + "勿复读示例" 约束</a:t>
+            </a:r>
+          </a:p>
+          <a:p>
+            <a:pPr>
+              <a:lnSpc>
+                <a:spcPct val="115000"/>
+              </a:lnSpc>
+            </a:pPr>
+            <a:r>
+              <a:rPr sz="1300">
+                <a:solidFill>
+                  <a:srgbClr val="CBD5E1"/>
+                </a:solidFill>
+                <a:latin typeface="Menlo"/>
+              </a:rPr>
+              <a:t>回归: 用例覆盖示例复读</a:t>
+            </a:r>
+          </a:p>
+          <a:p>
+            <a:pPr>
+              <a:lnSpc>
+                <a:spcPct val="115000"/>
+              </a:lnSpc>
+            </a:pPr>
+            <a:r>
+              <a:rPr sz="1300">
+                <a:solidFill>
+                  <a:srgbClr val="94A3B8"/>
+                </a:solidFill>
+                <a:latin typeface="Menlo"/>
+              </a:rPr>
+              <a:t># few-shot 是双刃剑:格式受益/内容风险</a:t>
+            </a:r>
+          </a:p>
+        </p:txBody>
+      </p:sp>
+      <p:sp>
+        <p:nvSpPr>
+          <p:cNvPr id="12" name="TextBox 11"/>
           <p:cNvSpPr txBox="1"/>
           <p:nvPr/>
         </p:nvSpPr>
@@ -25012,7 +24959,7 @@
       </p:sp>
       <p:sp>
         <p:nvSpPr>
-          <p:cNvPr id="14" name="TextBox 13"/>
+          <p:cNvPr id="13" name="TextBox 12"/>
           <p:cNvSpPr txBox="1"/>
           <p:nvPr/>
         </p:nvSpPr>
